--- a/output/education/archive/2026-03-24_medical-ai-reality-integrated/medical-ai-reality-integrated_slides_residents.pptx
+++ b/output/education/archive/2026-03-24_medical-ai-reality-integrated/medical-ai-reality-integrated_slides_residents.pptx
@@ -3136,6 +3136,7 @@
               </a:defRPr>
             </a:pPr>
             <a:r>
+              <a:rPr/>
               <a:t>医療AIの実態 2026</a:t>
             </a:r>
           </a:p>
@@ -3172,6 +3173,7 @@
               </a:defRPr>
             </a:pPr>
             <a:r>
+              <a:rPr/>
               <a:t>光と影を踏まえて、使いこなすために</a:t>
             </a:r>
           </a:p>
@@ -3216,7 +3218,9 @@
           <a:bodyPr rtlCol="0" anchor="ctr"/>
           <a:lstStyle/>
           <a:p>
-            <a:pPr algn="ctr"/>
+            <a:pPr algn="ctr">
+              <a:defRPr/>
+            </a:pPr>
           </a:p>
         </p:txBody>
       </p:sp>
@@ -3251,6 +3255,7 @@
               </a:defRPr>
             </a:pPr>
             <a:r>
+              <a:rPr/>
               <a:t>Doximity（米国医師向けプラットフォーム）8万人 + AMA（米国医師会）1,300人 調査から読む</a:t>
             </a:r>
           </a:p>
@@ -3287,6 +3292,7 @@
               </a:defRPr>
             </a:pPr>
             <a:r>
+              <a:rPr/>
               <a:t>研修医・専攻医向け 30分｜2026-03-24</a:t>
             </a:r>
           </a:p>
@@ -3327,7 +3333,7 @@
         <p:spPr>
           <a:xfrm>
             <a:off x="731520" y="274320"/>
-            <a:ext cx="7315200" cy="457200"/>
+            <a:ext cx="7315200" cy="518159"/>
           </a:xfrm>
           <a:prstGeom prst="rect">
             <a:avLst/>
@@ -3349,6 +3355,7 @@
               </a:defRPr>
             </a:pPr>
             <a:r>
+              <a:rPr/>
               <a:t>持ち帰り</a:t>
             </a:r>
           </a:p>
@@ -3363,7 +3370,7 @@
         <p:spPr>
           <a:xfrm>
             <a:off x="731520" y="914400"/>
-            <a:ext cx="2743200" cy="274320"/>
+            <a:ext cx="2743200" cy="340360"/>
           </a:xfrm>
           <a:prstGeom prst="rect">
             <a:avLst/>
@@ -3385,6 +3392,7 @@
               </a:defRPr>
             </a:pPr>
             <a:r>
+              <a:rPr/>
               <a:t>来週までの1アクション</a:t>
             </a:r>
           </a:p>
@@ -3398,7 +3406,7 @@
         </p:nvSpPr>
         <p:spPr>
           <a:xfrm>
-            <a:off x="731520" y="1234440"/>
+            <a:off x="731520" y="1273048"/>
             <a:ext cx="7680960" cy="1188720"/>
           </a:xfrm>
           <a:prstGeom prst="rect">
@@ -3422,6 +3430,7 @@
               <a:buChar char="●"/>
             </a:pPr>
             <a:r>
+              <a:rPr/>
               <a:t>自分が使っている（または使おうとしている）AIの「評価方法」を調べる</a:t>
             </a:r>
           </a:p>
@@ -3436,6 +3445,7 @@
               <a:buChar char="●"/>
             </a:pPr>
             <a:r>
+              <a:rPr/>
               <a:t>同僚と「AIの答えが自分の判断と違った経験」を共有</a:t>
             </a:r>
           </a:p>
@@ -3450,6 +3460,7 @@
               <a:buChar char="●"/>
             </a:pPr>
             <a:r>
+              <a:rPr/>
               <a:t>「パジャマタイム」がどれくらいあるか、自分で計測してみる</a:t>
             </a:r>
           </a:p>
@@ -3494,7 +3505,9 @@
           <a:bodyPr rtlCol="0" anchor="ctr"/>
           <a:lstStyle/>
           <a:p>
-            <a:pPr algn="ctr"/>
+            <a:pPr algn="ctr">
+              <a:defRPr/>
+            </a:pPr>
           </a:p>
         </p:txBody>
       </p:sp>
@@ -3529,15 +3542,18 @@
               </a:defRPr>
             </a:pPr>
             <a:r>
+              <a:rPr/>
               <a:t>医師の94%が使っているのに、</a:t>
             </a:r>
             <a:br/>
             <a:r>
+              <a:rPr/>
               <a:t>「どう安全に使うか」を議論している人はほとんどいない。</a:t>
             </a:r>
             <a:br/>
             <a:br/>
             <a:r>
+              <a:rPr/>
               <a:t>それを議論できるあなたは、もう一歩先にいる。</a:t>
             </a:r>
           </a:p>
@@ -3578,7 +3594,7 @@
         <p:spPr>
           <a:xfrm>
             <a:off x="731520" y="274320"/>
-            <a:ext cx="7315200" cy="457200"/>
+            <a:ext cx="7315200" cy="518159"/>
           </a:xfrm>
           <a:prstGeom prst="rect">
             <a:avLst/>
@@ -3600,6 +3616,7 @@
               </a:defRPr>
             </a:pPr>
             <a:r>
+              <a:rPr/>
               <a:t>数字が語る現実</a:t>
             </a:r>
           </a:p>
@@ -3646,7 +3663,9 @@
           <a:bodyPr rtlCol="0" anchor="ctr"/>
           <a:lstStyle/>
           <a:p>
-            <a:pPr algn="ctr"/>
+            <a:pPr algn="ctr">
+              <a:defRPr/>
+            </a:pPr>
           </a:p>
         </p:txBody>
       </p:sp>
@@ -3689,7 +3708,9 @@
           <a:bodyPr rtlCol="0" anchor="ctr"/>
           <a:lstStyle/>
           <a:p>
-            <a:pPr algn="ctr"/>
+            <a:pPr algn="ctr">
+              <a:defRPr/>
+            </a:pPr>
           </a:p>
         </p:txBody>
       </p:sp>
@@ -3702,7 +3723,7 @@
         <p:spPr>
           <a:xfrm>
             <a:off x="548640" y="868680"/>
-            <a:ext cx="1783080" cy="548640"/>
+            <a:ext cx="1783080" cy="660400"/>
           </a:xfrm>
           <a:prstGeom prst="rect">
             <a:avLst/>
@@ -3724,6 +3745,7 @@
               </a:defRPr>
             </a:pPr>
             <a:r>
+              <a:rPr/>
               <a:t>94%</a:t>
             </a:r>
           </a:p>
@@ -3737,7 +3759,7 @@
         </p:nvSpPr>
         <p:spPr>
           <a:xfrm>
-            <a:off x="548640" y="1417320"/>
+            <a:off x="548640" y="1547367"/>
             <a:ext cx="1783080" cy="731520"/>
           </a:xfrm>
           <a:prstGeom prst="rect">
@@ -3760,10 +3782,12 @@
               </a:defRPr>
             </a:pPr>
             <a:r>
+              <a:rPr/>
               <a:t>医師がAI利用中</a:t>
             </a:r>
             <a:br/>
             <a:r>
+              <a:rPr/>
               <a:t>または検討中</a:t>
             </a:r>
           </a:p>
@@ -3800,6 +3824,7 @@
               </a:defRPr>
             </a:pPr>
             <a:r>
+              <a:rPr/>
               <a:t>Doximity 2026</a:t>
             </a:r>
           </a:p>
@@ -3846,7 +3871,9 @@
           <a:bodyPr rtlCol="0" anchor="ctr"/>
           <a:lstStyle/>
           <a:p>
-            <a:pPr algn="ctr"/>
+            <a:pPr algn="ctr">
+              <a:defRPr/>
+            </a:pPr>
           </a:p>
         </p:txBody>
       </p:sp>
@@ -3889,7 +3916,9 @@
           <a:bodyPr rtlCol="0" anchor="ctr"/>
           <a:lstStyle/>
           <a:p>
-            <a:pPr algn="ctr"/>
+            <a:pPr algn="ctr">
+              <a:defRPr/>
+            </a:pPr>
           </a:p>
         </p:txBody>
       </p:sp>
@@ -3902,7 +3931,7 @@
         <p:spPr>
           <a:xfrm>
             <a:off x="2697480" y="868680"/>
-            <a:ext cx="1783080" cy="548640"/>
+            <a:ext cx="1783080" cy="660400"/>
           </a:xfrm>
           <a:prstGeom prst="rect">
             <a:avLst/>
@@ -3924,6 +3953,7 @@
               </a:defRPr>
             </a:pPr>
             <a:r>
+              <a:rPr/>
               <a:t>81%</a:t>
             </a:r>
           </a:p>
@@ -3937,7 +3967,7 @@
         </p:nvSpPr>
         <p:spPr>
           <a:xfrm>
-            <a:off x="2697480" y="1417320"/>
+            <a:off x="2697480" y="1547367"/>
             <a:ext cx="1783080" cy="731520"/>
           </a:xfrm>
           <a:prstGeom prst="rect">
@@ -3960,10 +3990,12 @@
               </a:defRPr>
             </a:pPr>
             <a:r>
+              <a:rPr/>
               <a:t>AI利用率</a:t>
             </a:r>
             <a:br/>
             <a:r>
+              <a:rPr/>
               <a:t>(2023年38%から倍増)</a:t>
             </a:r>
           </a:p>
@@ -4000,6 +4032,7 @@
               </a:defRPr>
             </a:pPr>
             <a:r>
+              <a:rPr/>
               <a:t>AMA 2025</a:t>
             </a:r>
           </a:p>
@@ -4046,7 +4079,9 @@
           <a:bodyPr rtlCol="0" anchor="ctr"/>
           <a:lstStyle/>
           <a:p>
-            <a:pPr algn="ctr"/>
+            <a:pPr algn="ctr">
+              <a:defRPr/>
+            </a:pPr>
           </a:p>
         </p:txBody>
       </p:sp>
@@ -4089,7 +4124,9 @@
           <a:bodyPr rtlCol="0" anchor="ctr"/>
           <a:lstStyle/>
           <a:p>
-            <a:pPr algn="ctr"/>
+            <a:pPr algn="ctr">
+              <a:defRPr/>
+            </a:pPr>
           </a:p>
         </p:txBody>
       </p:sp>
@@ -4102,7 +4139,7 @@
         <p:spPr>
           <a:xfrm>
             <a:off x="4846320" y="868680"/>
-            <a:ext cx="1783080" cy="548640"/>
+            <a:ext cx="1783080" cy="660400"/>
           </a:xfrm>
           <a:prstGeom prst="rect">
             <a:avLst/>
@@ -4124,6 +4161,7 @@
               </a:defRPr>
             </a:pPr>
             <a:r>
+              <a:rPr/>
               <a:t>2時間+</a:t>
             </a:r>
           </a:p>
@@ -4137,7 +4175,7 @@
         </p:nvSpPr>
         <p:spPr>
           <a:xfrm>
-            <a:off x="4846320" y="1417320"/>
+            <a:off x="4846320" y="1547367"/>
             <a:ext cx="1783080" cy="731520"/>
           </a:xfrm>
           <a:prstGeom prst="rect">
@@ -4160,10 +4198,12 @@
               </a:defRPr>
             </a:pPr>
             <a:r>
+              <a:rPr/>
               <a:t>1日あたりの</a:t>
             </a:r>
             <a:br/>
             <a:r>
+              <a:rPr/>
               <a:t>時短効果</a:t>
             </a:r>
           </a:p>
@@ -4200,6 +4240,7 @@
               </a:defRPr>
             </a:pPr>
             <a:r>
+              <a:rPr/>
               <a:t>アンビエントAI</a:t>
             </a:r>
           </a:p>
@@ -4246,7 +4287,9 @@
           <a:bodyPr rtlCol="0" anchor="ctr"/>
           <a:lstStyle/>
           <a:p>
-            <a:pPr algn="ctr"/>
+            <a:pPr algn="ctr">
+              <a:defRPr/>
+            </a:pPr>
           </a:p>
         </p:txBody>
       </p:sp>
@@ -4289,7 +4332,9 @@
           <a:bodyPr rtlCol="0" anchor="ctr"/>
           <a:lstStyle/>
           <a:p>
-            <a:pPr algn="ctr"/>
+            <a:pPr algn="ctr">
+              <a:defRPr/>
+            </a:pPr>
           </a:p>
         </p:txBody>
       </p:sp>
@@ -4302,7 +4347,7 @@
         <p:spPr>
           <a:xfrm>
             <a:off x="6995160" y="868680"/>
-            <a:ext cx="1783080" cy="548640"/>
+            <a:ext cx="1783080" cy="660400"/>
           </a:xfrm>
           <a:prstGeom prst="rect">
             <a:avLst/>
@@ -4324,6 +4369,7 @@
               </a:defRPr>
             </a:pPr>
             <a:r>
+              <a:rPr/>
               <a:t>#1</a:t>
             </a:r>
           </a:p>
@@ -4337,7 +4383,7 @@
         </p:nvSpPr>
         <p:spPr>
           <a:xfrm>
-            <a:off x="6995160" y="1417320"/>
+            <a:off x="6995160" y="1547367"/>
             <a:ext cx="1783080" cy="731520"/>
           </a:xfrm>
           <a:prstGeom prst="rect">
@@ -4360,10 +4406,12 @@
               </a:defRPr>
             </a:pPr>
             <a:r>
+              <a:rPr/>
               <a:t>家庭医が</a:t>
             </a:r>
             <a:br/>
             <a:r>
+              <a:rPr/>
               <a:t>AI最頻度ユーザー</a:t>
             </a:r>
           </a:p>
@@ -4400,6 +4448,7 @@
               </a:defRPr>
             </a:pPr>
             <a:r>
+              <a:rPr/>
               <a:t>Doximity 2026</a:t>
             </a:r>
           </a:p>
@@ -4436,6 +4485,7 @@
               </a:defRPr>
             </a:pPr>
             <a:r>
+              <a:rPr/>
               <a:t>「AIは使えるのか？」のフェーズは終わった。問題は「どう安全に使うか」。</a:t>
             </a:r>
           </a:p>
@@ -4476,7 +4526,7 @@
         <p:spPr>
           <a:xfrm>
             <a:off x="731520" y="274320"/>
-            <a:ext cx="7315200" cy="457200"/>
+            <a:ext cx="7315200" cy="518159"/>
           </a:xfrm>
           <a:prstGeom prst="rect">
             <a:avLst/>
@@ -4498,6 +4548,7 @@
               </a:defRPr>
             </a:pPr>
             <a:r>
+              <a:rPr/>
               <a:t>医師は何にAIを使っているのか</a:t>
             </a:r>
           </a:p>
@@ -4939,7 +4990,9 @@
           <a:bodyPr rtlCol="0" anchor="ctr"/>
           <a:lstStyle/>
           <a:p>
-            <a:pPr algn="ctr"/>
+            <a:pPr algn="ctr">
+              <a:defRPr/>
+            </a:pPr>
           </a:p>
         </p:txBody>
       </p:sp>
@@ -4984,7 +5037,9 @@
           <a:bodyPr rtlCol="0" anchor="ctr"/>
           <a:lstStyle/>
           <a:p>
-            <a:pPr algn="ctr"/>
+            <a:pPr algn="ctr">
+              <a:defRPr/>
+            </a:pPr>
           </a:p>
         </p:txBody>
       </p:sp>
@@ -5019,10 +5074,12 @@
               </a:defRPr>
             </a:pPr>
             <a:r>
+              <a:rPr/>
               <a:t>「パジャマタイム」= 勤務後にパジャマでカルテを書く時間。</a:t>
             </a:r>
             <a:br/>
             <a:r>
+              <a:rPr/>
               <a:t>AIが解消してくれるのは、「診断」ではなく「事務」。</a:t>
             </a:r>
           </a:p>
@@ -5063,7 +5120,7 @@
         <p:spPr>
           <a:xfrm>
             <a:off x="731520" y="274320"/>
-            <a:ext cx="7315200" cy="457200"/>
+            <a:ext cx="7315200" cy="518159"/>
           </a:xfrm>
           <a:prstGeom prst="rect">
             <a:avLst/>
@@ -5085,6 +5142,7 @@
               </a:defRPr>
             </a:pPr>
             <a:r>
+              <a:rPr/>
               <a:t>光の側</a:t>
             </a:r>
           </a:p>
@@ -5131,7 +5189,9 @@
           <a:bodyPr rtlCol="0" anchor="ctr"/>
           <a:lstStyle/>
           <a:p>
-            <a:pPr algn="ctr"/>
+            <a:pPr algn="ctr">
+              <a:defRPr/>
+            </a:pPr>
           </a:p>
         </p:txBody>
       </p:sp>
@@ -5174,7 +5234,9 @@
           <a:bodyPr rtlCol="0" anchor="ctr"/>
           <a:lstStyle/>
           <a:p>
-            <a:pPr algn="ctr"/>
+            <a:pPr algn="ctr">
+              <a:defRPr/>
+            </a:pPr>
           </a:p>
         </p:txBody>
       </p:sp>
@@ -5187,7 +5249,7 @@
         <p:spPr>
           <a:xfrm>
             <a:off x="868680" y="868680"/>
-            <a:ext cx="2286000" cy="274320"/>
+            <a:ext cx="2286000" cy="304799"/>
           </a:xfrm>
           <a:prstGeom prst="rect">
             <a:avLst/>
@@ -5209,6 +5271,7 @@
               </a:defRPr>
             </a:pPr>
             <a:r>
+              <a:rPr/>
               <a:t>OpenEvidence</a:t>
             </a:r>
           </a:p>
@@ -5222,8 +5285,8 @@
         </p:nvSpPr>
         <p:spPr>
           <a:xfrm>
-            <a:off x="868680" y="1143000"/>
-            <a:ext cx="2286000" cy="457200"/>
+            <a:off x="868680" y="1191767"/>
+            <a:ext cx="2286000" cy="482600"/>
           </a:xfrm>
           <a:prstGeom prst="rect">
             <a:avLst/>
@@ -5245,6 +5308,7 @@
               </a:defRPr>
             </a:pPr>
             <a:r>
+              <a:rPr/>
               <a:t>日100万件</a:t>
             </a:r>
           </a:p>
@@ -5258,7 +5322,7 @@
         </p:nvSpPr>
         <p:spPr>
           <a:xfrm>
-            <a:off x="868680" y="1645920"/>
+            <a:off x="868680" y="1692655"/>
             <a:ext cx="2286000" cy="640080"/>
           </a:xfrm>
           <a:prstGeom prst="rect">
@@ -5281,10 +5345,12 @@
               </a:defRPr>
             </a:pPr>
             <a:r>
+              <a:rPr/>
               <a:t>査読済み文献ベースの</a:t>
             </a:r>
             <a:br/>
             <a:r>
+              <a:rPr/>
               <a:t>臨床意思決定支援</a:t>
             </a:r>
           </a:p>
@@ -5331,7 +5397,9 @@
           <a:bodyPr rtlCol="0" anchor="ctr"/>
           <a:lstStyle/>
           <a:p>
-            <a:pPr algn="ctr"/>
+            <a:pPr algn="ctr">
+              <a:defRPr/>
+            </a:pPr>
           </a:p>
         </p:txBody>
       </p:sp>
@@ -5374,7 +5442,9 @@
           <a:bodyPr rtlCol="0" anchor="ctr"/>
           <a:lstStyle/>
           <a:p>
-            <a:pPr algn="ctr"/>
+            <a:pPr algn="ctr">
+              <a:defRPr/>
+            </a:pPr>
           </a:p>
         </p:txBody>
       </p:sp>
@@ -5387,7 +5457,7 @@
         <p:spPr>
           <a:xfrm>
             <a:off x="3657599" y="868680"/>
-            <a:ext cx="2286000" cy="274320"/>
+            <a:ext cx="2286000" cy="304799"/>
           </a:xfrm>
           <a:prstGeom prst="rect">
             <a:avLst/>
@@ -5409,6 +5479,7 @@
               </a:defRPr>
             </a:pPr>
             <a:r>
+              <a:rPr/>
               <a:t>AI研修 RCT</a:t>
             </a:r>
           </a:p>
@@ -5422,8 +5493,8 @@
         </p:nvSpPr>
         <p:spPr>
           <a:xfrm>
-            <a:off x="3657599" y="1143000"/>
-            <a:ext cx="2286000" cy="457200"/>
+            <a:off x="3657599" y="1191767"/>
+            <a:ext cx="2286000" cy="482600"/>
           </a:xfrm>
           <a:prstGeom prst="rect">
             <a:avLst/>
@@ -5445,6 +5516,7 @@
               </a:defRPr>
             </a:pPr>
             <a:r>
+              <a:rPr/>
               <a:t>保持率91%</a:t>
             </a:r>
           </a:p>
@@ -5458,7 +5530,7 @@
         </p:nvSpPr>
         <p:spPr>
           <a:xfrm>
-            <a:off x="3657599" y="1645920"/>
+            <a:off x="3657599" y="1692655"/>
             <a:ext cx="2286000" cy="640080"/>
           </a:xfrm>
           <a:prstGeom prst="rect">
@@ -5481,10 +5553,12 @@
               </a:defRPr>
             </a:pPr>
             <a:r>
+              <a:rPr/>
               <a:t>AIが研修医教育の</a:t>
             </a:r>
             <a:br/>
             <a:r>
+              <a:rPr/>
               <a:t>質を向上させる</a:t>
             </a:r>
           </a:p>
@@ -5531,7 +5605,9 @@
           <a:bodyPr rtlCol="0" anchor="ctr"/>
           <a:lstStyle/>
           <a:p>
-            <a:pPr algn="ctr"/>
+            <a:pPr algn="ctr">
+              <a:defRPr/>
+            </a:pPr>
           </a:p>
         </p:txBody>
       </p:sp>
@@ -5574,7 +5650,9 @@
           <a:bodyPr rtlCol="0" anchor="ctr"/>
           <a:lstStyle/>
           <a:p>
-            <a:pPr algn="ctr"/>
+            <a:pPr algn="ctr">
+              <a:defRPr/>
+            </a:pPr>
           </a:p>
         </p:txBody>
       </p:sp>
@@ -5587,7 +5665,7 @@
         <p:spPr>
           <a:xfrm>
             <a:off x="6446520" y="868680"/>
-            <a:ext cx="2286000" cy="274320"/>
+            <a:ext cx="2286000" cy="304799"/>
           </a:xfrm>
           <a:prstGeom prst="rect">
             <a:avLst/>
@@ -5609,6 +5687,7 @@
               </a:defRPr>
             </a:pPr>
             <a:r>
+              <a:rPr/>
               <a:t>Mount Sinai</a:t>
             </a:r>
           </a:p>
@@ -5622,8 +5701,8 @@
         </p:nvSpPr>
         <p:spPr>
           <a:xfrm>
-            <a:off x="6446520" y="1143000"/>
-            <a:ext cx="2286000" cy="457200"/>
+            <a:off x="6446520" y="1191767"/>
+            <a:ext cx="2286000" cy="482600"/>
           </a:xfrm>
           <a:prstGeom prst="rect">
             <a:avLst/>
@@ -5645,6 +5724,7 @@
               </a:defRPr>
             </a:pPr>
             <a:r>
+              <a:rPr/>
               <a:t>コスト65分の1</a:t>
             </a:r>
           </a:p>
@@ -5658,7 +5738,7 @@
         </p:nvSpPr>
         <p:spPr>
           <a:xfrm>
-            <a:off x="6446520" y="1645920"/>
+            <a:off x="6446520" y="1692655"/>
             <a:ext cx="2286000" cy="640080"/>
           </a:xfrm>
           <a:prstGeom prst="rect">
@@ -5681,10 +5761,12 @@
               </a:defRPr>
             </a:pPr>
             <a:r>
+              <a:rPr/>
               <a:t>マルチエージェントAIが</a:t>
             </a:r>
             <a:br/>
             <a:r>
+              <a:rPr/>
               <a:t>単独より優秀</a:t>
             </a:r>
           </a:p>
@@ -5725,7 +5807,7 @@
         <p:spPr>
           <a:xfrm>
             <a:off x="731520" y="274320"/>
-            <a:ext cx="7315200" cy="457200"/>
+            <a:ext cx="7315200" cy="518159"/>
           </a:xfrm>
           <a:prstGeom prst="rect">
             <a:avLst/>
@@ -5747,6 +5829,7 @@
               </a:defRPr>
             </a:pPr>
             <a:r>
+              <a:rPr/>
               <a:t>影の側</a:t>
             </a:r>
           </a:p>
@@ -5793,7 +5876,9 @@
           <a:bodyPr rtlCol="0" anchor="ctr"/>
           <a:lstStyle/>
           <a:p>
-            <a:pPr algn="ctr"/>
+            <a:pPr algn="ctr">
+              <a:defRPr/>
+            </a:pPr>
           </a:p>
         </p:txBody>
       </p:sp>
@@ -5836,7 +5921,9 @@
           <a:bodyPr rtlCol="0" anchor="ctr"/>
           <a:lstStyle/>
           <a:p>
-            <a:pPr algn="ctr"/>
+            <a:pPr algn="ctr">
+              <a:defRPr/>
+            </a:pPr>
           </a:p>
         </p:txBody>
       </p:sp>
@@ -5849,7 +5936,7 @@
         <p:spPr>
           <a:xfrm>
             <a:off x="868680" y="868680"/>
-            <a:ext cx="2286000" cy="274320"/>
+            <a:ext cx="2286000" cy="304799"/>
           </a:xfrm>
           <a:prstGeom prst="rect">
             <a:avLst/>
@@ -5871,6 +5958,7 @@
               </a:defRPr>
             </a:pPr>
             <a:r>
+              <a:rPr/>
               <a:t>ECRI患者安全</a:t>
             </a:r>
           </a:p>
@@ -5884,7 +5972,7 @@
         </p:nvSpPr>
         <p:spPr>
           <a:xfrm>
-            <a:off x="868680" y="1143000"/>
+            <a:off x="868680" y="1191767"/>
             <a:ext cx="2286000" cy="457200"/>
           </a:xfrm>
           <a:prstGeom prst="rect">
@@ -5907,6 +5995,7 @@
               </a:defRPr>
             </a:pPr>
             <a:r>
+              <a:rPr/>
               <a:t>AI診断が#1</a:t>
             </a:r>
           </a:p>
@@ -5920,7 +6009,7 @@
         </p:nvSpPr>
         <p:spPr>
           <a:xfrm>
-            <a:off x="868680" y="1645920"/>
+            <a:off x="868680" y="1667255"/>
             <a:ext cx="2286000" cy="914400"/>
           </a:xfrm>
           <a:prstGeom prst="rect">
@@ -5943,14 +6032,17 @@
               </a:defRPr>
             </a:pPr>
             <a:r>
+              <a:rPr/>
               <a:t>ECRI = Emergency Care Research</a:t>
             </a:r>
             <a:br/>
             <a:r>
+              <a:rPr/>
               <a:t>Institute（米国医療安全研究機構）</a:t>
             </a:r>
             <a:br/>
             <a:r>
+              <a:rPr/>
               <a:t>自動化バイアスが誤診リスクを増大</a:t>
             </a:r>
           </a:p>
@@ -5997,7 +6089,9 @@
           <a:bodyPr rtlCol="0" anchor="ctr"/>
           <a:lstStyle/>
           <a:p>
-            <a:pPr algn="ctr"/>
+            <a:pPr algn="ctr">
+              <a:defRPr/>
+            </a:pPr>
           </a:p>
         </p:txBody>
       </p:sp>
@@ -6040,7 +6134,9 @@
           <a:bodyPr rtlCol="0" anchor="ctr"/>
           <a:lstStyle/>
           <a:p>
-            <a:pPr algn="ctr"/>
+            <a:pPr algn="ctr">
+              <a:defRPr/>
+            </a:pPr>
           </a:p>
         </p:txBody>
       </p:sp>
@@ -6053,7 +6149,7 @@
         <p:spPr>
           <a:xfrm>
             <a:off x="3657599" y="868680"/>
-            <a:ext cx="2286000" cy="274320"/>
+            <a:ext cx="2286000" cy="304799"/>
           </a:xfrm>
           <a:prstGeom prst="rect">
             <a:avLst/>
@@ -6075,6 +6171,7 @@
               </a:defRPr>
             </a:pPr>
             <a:r>
+              <a:rPr/>
               <a:t>スタンフォード</a:t>
             </a:r>
           </a:p>
@@ -6088,7 +6185,7 @@
         </p:nvSpPr>
         <p:spPr>
           <a:xfrm>
-            <a:off x="3657599" y="1143000"/>
+            <a:off x="3657599" y="1191767"/>
             <a:ext cx="2286000" cy="457200"/>
           </a:xfrm>
           <a:prstGeom prst="rect">
@@ -6111,6 +6208,7 @@
               </a:defRPr>
             </a:pPr>
             <a:r>
+              <a:rPr/>
               <a:t>半数が試験で評価</a:t>
             </a:r>
           </a:p>
@@ -6124,7 +6222,7 @@
         </p:nvSpPr>
         <p:spPr>
           <a:xfrm>
-            <a:off x="3657599" y="1645920"/>
+            <a:off x="3657599" y="1667255"/>
             <a:ext cx="2286000" cy="914400"/>
           </a:xfrm>
           <a:prstGeom prst="rect">
@@ -6147,10 +6245,12 @@
               </a:defRPr>
             </a:pPr>
             <a:r>
+              <a:rPr/>
               <a:t>実患者データは</a:t>
             </a:r>
             <a:br/>
             <a:r>
+              <a:rPr/>
               <a:t>わずか5%</a:t>
             </a:r>
           </a:p>
@@ -6197,7 +6297,9 @@
           <a:bodyPr rtlCol="0" anchor="ctr"/>
           <a:lstStyle/>
           <a:p>
-            <a:pPr algn="ctr"/>
+            <a:pPr algn="ctr">
+              <a:defRPr/>
+            </a:pPr>
           </a:p>
         </p:txBody>
       </p:sp>
@@ -6240,7 +6342,9 @@
           <a:bodyPr rtlCol="0" anchor="ctr"/>
           <a:lstStyle/>
           <a:p>
-            <a:pPr algn="ctr"/>
+            <a:pPr algn="ctr">
+              <a:defRPr/>
+            </a:pPr>
           </a:p>
         </p:txBody>
       </p:sp>
@@ -6253,7 +6357,7 @@
         <p:spPr>
           <a:xfrm>
             <a:off x="6446520" y="868680"/>
-            <a:ext cx="2286000" cy="274320"/>
+            <a:ext cx="2286000" cy="304799"/>
           </a:xfrm>
           <a:prstGeom prst="rect">
             <a:avLst/>
@@ -6275,6 +6379,7 @@
               </a:defRPr>
             </a:pPr>
             <a:r>
+              <a:rPr/>
               <a:t>AMA倫理</a:t>
             </a:r>
           </a:p>
@@ -6288,7 +6393,7 @@
         </p:nvSpPr>
         <p:spPr>
           <a:xfrm>
-            <a:off x="6446520" y="1143000"/>
+            <a:off x="6446520" y="1191767"/>
             <a:ext cx="2286000" cy="457200"/>
           </a:xfrm>
           <a:prstGeom prst="rect">
@@ -6311,6 +6416,7 @@
               </a:defRPr>
             </a:pPr>
             <a:r>
+              <a:rPr/>
               <a:t>監視の空洞</a:t>
             </a:r>
           </a:p>
@@ -6324,7 +6430,7 @@
         </p:nvSpPr>
         <p:spPr>
           <a:xfrm>
-            <a:off x="6446520" y="1645920"/>
+            <a:off x="6446520" y="1667255"/>
             <a:ext cx="2286000" cy="914400"/>
           </a:xfrm>
           <a:prstGeom prst="rect">
@@ -6347,14 +6453,17 @@
               </a:defRPr>
             </a:pPr>
             <a:r>
+              <a:rPr/>
               <a:t>AMA = American Medical Association</a:t>
             </a:r>
             <a:br/>
             <a:r>
+              <a:rPr/>
               <a:t>（米国医師会）</a:t>
             </a:r>
             <a:br/>
             <a:r>
+              <a:rPr/>
               <a:t>倫理ジャーナル廃刊 x AIセンター設立</a:t>
             </a:r>
           </a:p>
@@ -6395,7 +6504,7 @@
         <p:spPr>
           <a:xfrm>
             <a:off x="731520" y="274320"/>
-            <a:ext cx="7315200" cy="457200"/>
+            <a:ext cx="7315200" cy="518159"/>
           </a:xfrm>
           <a:prstGeom prst="rect">
             <a:avLst/>
@@ -6417,6 +6526,7 @@
               </a:defRPr>
             </a:pPr>
             <a:r>
+              <a:rPr/>
               <a:t>国家レベルの応答</a:t>
             </a:r>
           </a:p>
@@ -6430,8 +6540,8 @@
         </p:nvSpPr>
         <p:spPr>
           <a:xfrm>
-            <a:off x="731520" y="731520"/>
-            <a:ext cx="7315200" cy="274320"/>
+            <a:off x="731520" y="810767"/>
+            <a:ext cx="7315200" cy="287020"/>
           </a:xfrm>
           <a:prstGeom prst="rect">
             <a:avLst/>
@@ -6453,6 +6563,7 @@
               </a:defRPr>
             </a:pPr>
             <a:r>
+              <a:rPr/>
               <a:t>NAM = National Academy of Medicine（米国医学アカデミー）</a:t>
             </a:r>
           </a:p>
@@ -6499,7 +6610,9 @@
           <a:bodyPr rtlCol="0" anchor="ctr"/>
           <a:lstStyle/>
           <a:p>
-            <a:pPr algn="ctr"/>
+            <a:pPr algn="ctr">
+              <a:defRPr/>
+            </a:pPr>
           </a:p>
         </p:txBody>
       </p:sp>
@@ -6512,7 +6625,7 @@
         <p:spPr>
           <a:xfrm>
             <a:off x="868680" y="1188720"/>
-            <a:ext cx="7315200" cy="274320"/>
+            <a:ext cx="7315200" cy="340360"/>
           </a:xfrm>
           <a:prstGeom prst="rect">
             <a:avLst/>
@@ -6534,6 +6647,7 @@
               </a:defRPr>
             </a:pPr>
             <a:r>
+              <a:rPr/>
               <a:t>「AI時代の患者安全」イニシアチブ -- 2026年3月発足</a:t>
             </a:r>
           </a:p>
@@ -6547,7 +6661,7 @@
         </p:nvSpPr>
         <p:spPr>
           <a:xfrm>
-            <a:off x="868680" y="1508760"/>
+            <a:off x="868680" y="1547368"/>
             <a:ext cx="7315200" cy="1188720"/>
           </a:xfrm>
           <a:prstGeom prst="rect">
@@ -6570,14 +6684,17 @@
               </a:defRPr>
             </a:pPr>
             <a:r>
+              <a:rPr/>
               <a:t>Mayo Clinic CEOらが共同議長</a:t>
             </a:r>
             <a:br/>
             <a:r>
+              <a:rPr/>
               <a:t>「To Err Is Human」（2000年の画期的報告書）の遺産を継承</a:t>
             </a:r>
             <a:br/>
             <a:r>
+              <a:rPr/>
               <a:t>AIを活用した「ゼロハーム」国家戦略を策定中</a:t>
             </a:r>
           </a:p>
@@ -6622,7 +6739,9 @@
           <a:bodyPr rtlCol="0" anchor="ctr"/>
           <a:lstStyle/>
           <a:p>
-            <a:pPr algn="ctr"/>
+            <a:pPr algn="ctr">
+              <a:defRPr/>
+            </a:pPr>
           </a:p>
         </p:txBody>
       </p:sp>
@@ -6667,7 +6786,9 @@
           <a:bodyPr rtlCol="0" anchor="ctr"/>
           <a:lstStyle/>
           <a:p>
-            <a:pPr algn="ctr"/>
+            <a:pPr algn="ctr">
+              <a:defRPr/>
+            </a:pPr>
           </a:p>
         </p:txBody>
       </p:sp>
@@ -6702,10 +6823,12 @@
               </a:defRPr>
             </a:pPr>
             <a:r>
+              <a:rPr/>
               <a:t>ECRI（米国医療安全研究機構）が「警告」を出し、NAMが「戦略」を立てる。</a:t>
             </a:r>
             <a:br/>
             <a:r>
+              <a:rPr/>
               <a:t>「光と影」のその先に、「制度設計」が始まっている。</a:t>
             </a:r>
           </a:p>
@@ -6746,7 +6869,7 @@
         <p:spPr>
           <a:xfrm>
             <a:off x="731520" y="274320"/>
-            <a:ext cx="7315200" cy="457200"/>
+            <a:ext cx="7315200" cy="518159"/>
           </a:xfrm>
           <a:prstGeom prst="rect">
             <a:avLst/>
@@ -6768,6 +6891,7 @@
               </a:defRPr>
             </a:pPr>
             <a:r>
+              <a:rPr/>
               <a:t>安全に使うための4ステップ</a:t>
             </a:r>
           </a:p>
@@ -6781,8 +6905,8 @@
         </p:nvSpPr>
         <p:spPr>
           <a:xfrm>
-            <a:off x="731520" y="685800"/>
-            <a:ext cx="7315200" cy="274320"/>
+            <a:off x="731520" y="810767"/>
+            <a:ext cx="7315200" cy="304799"/>
           </a:xfrm>
           <a:prstGeom prst="rect">
             <a:avLst/>
@@ -6804,6 +6928,7 @@
               </a:defRPr>
             </a:pPr>
             <a:r>
+              <a:rPr/>
               <a:t>フレームワーク「知る→疑う→補完→伝える」</a:t>
             </a:r>
           </a:p>
@@ -6850,7 +6975,9 @@
           <a:bodyPr rtlCol="0" anchor="ctr"/>
           <a:lstStyle/>
           <a:p>
-            <a:pPr algn="ctr"/>
+            <a:pPr algn="ctr">
+              <a:defRPr/>
+            </a:pPr>
           </a:p>
         </p:txBody>
       </p:sp>
@@ -6893,7 +7020,9 @@
           <a:bodyPr rtlCol="0" anchor="ctr"/>
           <a:lstStyle/>
           <a:p>
-            <a:pPr algn="ctr"/>
+            <a:pPr algn="ctr">
+              <a:defRPr/>
+            </a:pPr>
           </a:p>
         </p:txBody>
       </p:sp>
@@ -6905,7 +7034,7 @@
         </p:nvSpPr>
         <p:spPr>
           <a:xfrm>
-            <a:off x="548640" y="1097280"/>
+            <a:off x="548640" y="1133854"/>
             <a:ext cx="1783080" cy="457200"/>
           </a:xfrm>
           <a:prstGeom prst="rect">
@@ -6928,6 +7057,7 @@
               </a:defRPr>
             </a:pPr>
             <a:r>
+              <a:rPr/>
               <a:t>(1) 知る</a:t>
             </a:r>
           </a:p>
@@ -6964,10 +7094,12 @@
               </a:defRPr>
             </a:pPr>
             <a:r>
+              <a:rPr/>
               <a:t>このAIは何で</a:t>
             </a:r>
             <a:br/>
             <a:r>
+              <a:rPr/>
               <a:t>評価された？</a:t>
             </a:r>
           </a:p>
@@ -7014,7 +7146,9 @@
           <a:bodyPr rtlCol="0" anchor="ctr"/>
           <a:lstStyle/>
           <a:p>
-            <a:pPr algn="ctr"/>
+            <a:pPr algn="ctr">
+              <a:defRPr/>
+            </a:pPr>
           </a:p>
         </p:txBody>
       </p:sp>
@@ -7057,7 +7191,9 @@
           <a:bodyPr rtlCol="0" anchor="ctr"/>
           <a:lstStyle/>
           <a:p>
-            <a:pPr algn="ctr"/>
+            <a:pPr algn="ctr">
+              <a:defRPr/>
+            </a:pPr>
           </a:p>
         </p:txBody>
       </p:sp>
@@ -7069,7 +7205,7 @@
         </p:nvSpPr>
         <p:spPr>
           <a:xfrm>
-            <a:off x="2697480" y="1097280"/>
+            <a:off x="2697480" y="1133854"/>
             <a:ext cx="1783080" cy="457200"/>
           </a:xfrm>
           <a:prstGeom prst="rect">
@@ -7092,6 +7228,7 @@
               </a:defRPr>
             </a:pPr>
             <a:r>
+              <a:rPr/>
               <a:t>(2) 疑う</a:t>
             </a:r>
           </a:p>
@@ -7128,10 +7265,12 @@
               </a:defRPr>
             </a:pPr>
             <a:r>
+              <a:rPr/>
               <a:t>自分の判断と</a:t>
             </a:r>
             <a:br/>
             <a:r>
+              <a:rPr/>
               <a:t>照合する</a:t>
             </a:r>
           </a:p>
@@ -7178,7 +7317,9 @@
           <a:bodyPr rtlCol="0" anchor="ctr"/>
           <a:lstStyle/>
           <a:p>
-            <a:pPr algn="ctr"/>
+            <a:pPr algn="ctr">
+              <a:defRPr/>
+            </a:pPr>
           </a:p>
         </p:txBody>
       </p:sp>
@@ -7221,7 +7362,9 @@
           <a:bodyPr rtlCol="0" anchor="ctr"/>
           <a:lstStyle/>
           <a:p>
-            <a:pPr algn="ctr"/>
+            <a:pPr algn="ctr">
+              <a:defRPr/>
+            </a:pPr>
           </a:p>
         </p:txBody>
       </p:sp>
@@ -7233,7 +7376,7 @@
         </p:nvSpPr>
         <p:spPr>
           <a:xfrm>
-            <a:off x="4846320" y="1097280"/>
+            <a:off x="4846320" y="1133854"/>
             <a:ext cx="1783080" cy="457200"/>
           </a:xfrm>
           <a:prstGeom prst="rect">
@@ -7256,6 +7399,7 @@
               </a:defRPr>
             </a:pPr>
             <a:r>
+              <a:rPr/>
               <a:t>(3) 補完</a:t>
             </a:r>
           </a:p>
@@ -7292,10 +7436,12 @@
               </a:defRPr>
             </a:pPr>
             <a:r>
+              <a:rPr/>
               <a:t>AI+人間の</a:t>
             </a:r>
             <a:br/>
             <a:r>
+              <a:rPr/>
               <a:t>強みを組み合わせ</a:t>
             </a:r>
           </a:p>
@@ -7342,7 +7488,9 @@
           <a:bodyPr rtlCol="0" anchor="ctr"/>
           <a:lstStyle/>
           <a:p>
-            <a:pPr algn="ctr"/>
+            <a:pPr algn="ctr">
+              <a:defRPr/>
+            </a:pPr>
           </a:p>
         </p:txBody>
       </p:sp>
@@ -7385,7 +7533,9 @@
           <a:bodyPr rtlCol="0" anchor="ctr"/>
           <a:lstStyle/>
           <a:p>
-            <a:pPr algn="ctr"/>
+            <a:pPr algn="ctr">
+              <a:defRPr/>
+            </a:pPr>
           </a:p>
         </p:txBody>
       </p:sp>
@@ -7397,7 +7547,7 @@
         </p:nvSpPr>
         <p:spPr>
           <a:xfrm>
-            <a:off x="6995160" y="1097280"/>
+            <a:off x="6995160" y="1133854"/>
             <a:ext cx="1783080" cy="457200"/>
           </a:xfrm>
           <a:prstGeom prst="rect">
@@ -7420,6 +7570,7 @@
               </a:defRPr>
             </a:pPr>
             <a:r>
+              <a:rPr/>
               <a:t>(4) 伝える</a:t>
             </a:r>
           </a:p>
@@ -7456,10 +7607,12 @@
               </a:defRPr>
             </a:pPr>
             <a:r>
+              <a:rPr/>
               <a:t>患者に</a:t>
             </a:r>
             <a:br/>
             <a:r>
+              <a:rPr/>
               <a:t>透明性を保つ</a:t>
             </a:r>
           </a:p>
@@ -7496,6 +7649,7 @@
               </a:defRPr>
             </a:pPr>
             <a:r>
+              <a:rPr/>
               <a:t>[!] AIの答えを鵜呑みにしない。常に自分の臨床判断と照合する。</a:t>
             </a:r>
           </a:p>
@@ -7536,7 +7690,7 @@
         <p:spPr>
           <a:xfrm>
             <a:off x="731520" y="274320"/>
-            <a:ext cx="7315200" cy="457200"/>
+            <a:ext cx="7315200" cy="518159"/>
           </a:xfrm>
           <a:prstGeom prst="rect">
             <a:avLst/>
@@ -7558,6 +7712,7 @@
               </a:defRPr>
             </a:pPr>
             <a:r>
+              <a:rPr/>
               <a:t>倫理の空洞 -- 誰が監視するのか</a:t>
             </a:r>
           </a:p>
@@ -7595,6 +7750,7 @@
               <a:buChar char="●"/>
             </a:pPr>
             <a:r>
+              <a:rPr/>
               <a:t>AMA = American Medical Association（米国医師会）が倫理ジャーナルを廃刊</a:t>
             </a:r>
           </a:p>
@@ -7609,6 +7765,7 @@
               <a:buChar char="●"/>
             </a:pPr>
             <a:r>
+              <a:rPr/>
               <a:t>同時にAIセンターを設立 -- 「倫理」より「実装」を優先する姿勢</a:t>
             </a:r>
           </a:p>
@@ -7623,6 +7780,7 @@
               <a:buChar char="●"/>
             </a:pPr>
             <a:r>
+              <a:rPr/>
               <a:t>IC = Informed Consent（インフォームドコンセント：説明と同意）にAI使用を含めるべきか未定</a:t>
             </a:r>
           </a:p>
@@ -7637,6 +7795,7 @@
               <a:buChar char="●"/>
             </a:pPr>
             <a:r>
+              <a:rPr/>
               <a:t>VC = Venture Capital（ベンチャーキャピタル：投資ファンド）が医療AI市場に大量資金投入</a:t>
             </a:r>
           </a:p>
@@ -7651,6 +7810,7 @@
               <a:buChar char="●"/>
             </a:pPr>
             <a:r>
+              <a:rPr/>
               <a:t>「誰のためのAIか」が問われている -- 患者か、効率化か、投資家か</a:t>
             </a:r>
           </a:p>
@@ -7695,7 +7855,9 @@
           <a:bodyPr rtlCol="0" anchor="ctr"/>
           <a:lstStyle/>
           <a:p>
-            <a:pPr algn="ctr"/>
+            <a:pPr algn="ctr">
+              <a:defRPr/>
+            </a:pPr>
           </a:p>
         </p:txBody>
       </p:sp>
@@ -7740,7 +7902,9 @@
           <a:bodyPr rtlCol="0" anchor="ctr"/>
           <a:lstStyle/>
           <a:p>
-            <a:pPr algn="ctr"/>
+            <a:pPr algn="ctr">
+              <a:defRPr/>
+            </a:pPr>
           </a:p>
         </p:txBody>
       </p:sp>
@@ -7775,10 +7939,12 @@
               </a:defRPr>
             </a:pPr>
             <a:r>
+              <a:rPr/>
               <a:t>テクノロジーの進歩に、倫理的議論が追いついていない。</a:t>
             </a:r>
             <a:br/>
             <a:r>
+              <a:rPr/>
               <a:t>だからこそ、現場の医師が考える必要がある。</a:t>
             </a:r>
           </a:p>
@@ -7819,7 +7985,7 @@
         <p:spPr>
           <a:xfrm>
             <a:off x="731520" y="274320"/>
-            <a:ext cx="7315200" cy="457200"/>
+            <a:ext cx="7315200" cy="589279"/>
           </a:xfrm>
           <a:prstGeom prst="rect">
             <a:avLst/>
@@ -7841,6 +8007,7 @@
               </a:defRPr>
             </a:pPr>
             <a:r>
+              <a:rPr/>
               <a:t>ディスカッション</a:t>
             </a:r>
           </a:p>
@@ -7854,8 +8021,8 @@
         </p:nvSpPr>
         <p:spPr>
           <a:xfrm>
-            <a:off x="731520" y="731520"/>
-            <a:ext cx="2743200" cy="320040"/>
+            <a:off x="731520" y="881887"/>
+            <a:ext cx="2743200" cy="340360"/>
           </a:xfrm>
           <a:prstGeom prst="rect">
             <a:avLst/>
@@ -7877,6 +8044,7 @@
               </a:defRPr>
             </a:pPr>
             <a:r>
+              <a:rPr/>
               <a:t>4分間 → 全体共有 2分</a:t>
             </a:r>
           </a:p>
@@ -7921,7 +8089,9 @@
           <a:bodyPr rtlCol="0" anchor="ctr"/>
           <a:lstStyle/>
           <a:p>
-            <a:pPr algn="ctr"/>
+            <a:pPr algn="ctr">
+              <a:defRPr/>
+            </a:pPr>
           </a:p>
         </p:txBody>
       </p:sp>
@@ -7966,7 +8136,9 @@
           <a:bodyPr rtlCol="0" anchor="ctr"/>
           <a:lstStyle/>
           <a:p>
-            <a:pPr algn="ctr"/>
+            <a:pPr algn="ctr">
+              <a:defRPr/>
+            </a:pPr>
           </a:p>
         </p:txBody>
       </p:sp>
@@ -8001,14 +8173,17 @@
               </a:defRPr>
             </a:pPr>
             <a:r>
+              <a:rPr/>
               <a:t>あなたがAIを使って「助かった」経験と</a:t>
             </a:r>
             <a:br/>
             <a:r>
+              <a:rPr/>
               <a:t>「危なかった」経験は？</a:t>
             </a:r>
             <a:br/>
             <a:r>
+              <a:rPr/>
               <a:t>その違いは何だったか？</a:t>
             </a:r>
           </a:p>
@@ -8023,7 +8198,7 @@
         <p:spPr>
           <a:xfrm>
             <a:off x="731520" y="2468880"/>
-            <a:ext cx="2743200" cy="274320"/>
+            <a:ext cx="2743200" cy="340360"/>
           </a:xfrm>
           <a:prstGeom prst="rect">
             <a:avLst/>
@@ -8045,6 +8220,7 @@
               </a:defRPr>
             </a:pPr>
             <a:r>
+              <a:rPr/>
               <a:t>考えるヒント</a:t>
             </a:r>
           </a:p>
@@ -8058,7 +8234,7 @@
         </p:nvSpPr>
         <p:spPr>
           <a:xfrm>
-            <a:off x="731520" y="2788920"/>
+            <a:off x="731520" y="2827528"/>
             <a:ext cx="7680960" cy="1645920"/>
           </a:xfrm>
           <a:prstGeom prst="rect">
@@ -8082,6 +8258,7 @@
               <a:buChar char="●"/>
             </a:pPr>
             <a:r>
+              <a:rPr/>
               <a:t>AIの答えをそのまま使ったことはあるか？</a:t>
             </a:r>
           </a:p>
@@ -8096,6 +8273,7 @@
               <a:buChar char="●"/>
             </a:pPr>
             <a:r>
+              <a:rPr/>
               <a:t>患者にAI使用を伝えたことはあるか？</a:t>
             </a:r>
           </a:p>
@@ -8110,6 +8288,7 @@
               <a:buChar char="●"/>
             </a:pPr>
             <a:r>
+              <a:rPr/>
               <a:t>AIの間違いに気づいた経験はあるか？</a:t>
             </a:r>
           </a:p>
